--- a/metro/metro-f02-just-sold.pptx
+++ b/metro/metro-f02-just-sold.pptx
@@ -3558,9 +3558,9 @@
                 <a:solidFill>
                   <a:srgbClr val="14161A"/>
                 </a:solidFill>
-                <a:latin typeface="Space Grotesk"/>
-                <a:ea typeface="Space Grotesk"/>
-                <a:cs typeface="Space Grotesk"/>
+                <a:latin typeface="HK Grotesk"/>
+                <a:ea typeface="HK Grotesk"/>
+                <a:cs typeface="HK Grotesk"/>
               </a:rPr>
               <a:t>NO</a:t>
             </a:r>
@@ -3597,9 +3597,9 @@
                 <a:solidFill>
                   <a:srgbClr val="14161A"/>
                 </a:solidFill>
-                <a:latin typeface="Space Grotesk"/>
-                <a:ea typeface="Space Grotesk"/>
-                <a:cs typeface="Space Grotesk"/>
+                <a:latin typeface="HK Grotesk"/>
+                <a:ea typeface="HK Grotesk"/>
+                <a:cs typeface="HK Grotesk"/>
               </a:rPr>
               <a:t>North &amp; Oak</a:t>
             </a:r>
@@ -3741,9 +3741,9 @@
                 <a:solidFill>
                   <a:srgbClr val="14161A"/>
                 </a:solidFill>
-                <a:latin typeface="Space Grotesk"/>
-                <a:ea typeface="Space Grotesk"/>
-                <a:cs typeface="Space Grotesk"/>
+                <a:latin typeface="HK Grotesk"/>
+                <a:ea typeface="HK Grotesk"/>
+                <a:cs typeface="HK Grotesk"/>
               </a:rPr>
               <a:t>Sold.</a:t>
             </a:r>
@@ -3780,9 +3780,9 @@
                 <a:solidFill>
                   <a:srgbClr val="24272E"/>
                 </a:solidFill>
-                <a:latin typeface="Space Grotesk"/>
-                <a:ea typeface="Space Grotesk"/>
-                <a:cs typeface="Space Grotesk"/>
+                <a:latin typeface="HK Grotesk"/>
+                <a:ea typeface="HK Grotesk"/>
+                <a:cs typeface="HK Grotesk"/>
               </a:rPr>
               <a:t>Another family in their dream home. Congratulations to the new owners of 1200 N Wells, 14C — wishing you many bright mornings ahead.</a:t>
             </a:r>
